--- a/workshops/iu-ventures-ai-101/phase-2-presentation.pptx
+++ b/workshops/iu-ventures-ai-101/phase-2-presentation.pptx
@@ -4512,6 +4512,41 @@
           </a:p>
         </p:txBody>
       </p:sp>
+      <p:sp>
+        <p:nvSpPr>
+          <p:cNvPr id="10" name="TextBox 9"/>
+          <p:cNvSpPr txBox="1"/>
+          <p:nvPr/>
+        </p:nvSpPr>
+        <p:spPr>
+          <a:xfrm>
+            <a:off x="548640" y="6172200"/>
+            <a:ext cx="11064240" cy="411480"/>
+          </a:xfrm>
+          <a:prstGeom prst="rect">
+            <a:avLst/>
+          </a:prstGeom>
+          <a:noFill/>
+        </p:spPr>
+        <p:txBody>
+          <a:bodyPr wrap="square">
+            <a:spAutoFit/>
+          </a:bodyPr>
+          <a:lstStyle/>
+          <a:p>
+            <a:pPr algn="l"/>
+            <a:r>
+              <a:rPr sz="1300" b="0" i="1">
+                <a:solidFill>
+                  <a:srgbClr val="6B7280"/>
+                </a:solidFill>
+                <a:latin typeface="Calibri"/>
+              </a:rPr>
+              <a:t>Full install guide:  docs.anthropic.com/en/docs/claude-code/quickstart</a:t>
+            </a:r>
+          </a:p>
+        </p:txBody>
+      </p:sp>
     </p:spTree>
   </p:cSld>
   <p:clrMapOvr>
@@ -5134,8 +5169,8 @@
         </p:nvSpPr>
         <p:spPr>
           <a:xfrm>
-            <a:off x="548640" y="4206240"/>
-            <a:ext cx="11064240" cy="548640"/>
+            <a:off x="548640" y="4160520"/>
+            <a:ext cx="320040" cy="548640"/>
           </a:xfrm>
           <a:prstGeom prst="rect">
             <a:avLst/>
@@ -5148,19 +5183,124 @@
           </a:bodyPr>
           <a:lstStyle/>
           <a:p>
+            <a:pPr algn="l"/>
+            <a:r>
+              <a:rPr sz="1400" b="0" i="0">
+                <a:solidFill>
+                  <a:srgbClr val="C9913A"/>
+                </a:solidFill>
+                <a:latin typeface="Calibri"/>
+              </a:rPr>
+              <a:t>●</a:t>
+            </a:r>
+          </a:p>
+        </p:txBody>
+      </p:sp>
+      <p:sp>
+        <p:nvSpPr>
+          <p:cNvPr id="13" name="TextBox 12"/>
+          <p:cNvSpPr txBox="1"/>
+          <p:nvPr/>
+        </p:nvSpPr>
+        <p:spPr>
+          <a:xfrm>
+            <a:off x="868680" y="4160520"/>
+            <a:ext cx="4114800" cy="502920"/>
+          </a:xfrm>
+          <a:prstGeom prst="rect">
+            <a:avLst/>
+          </a:prstGeom>
+          <a:noFill/>
+        </p:spPr>
+        <p:txBody>
+          <a:bodyPr wrap="square">
+            <a:spAutoFit/>
+          </a:bodyPr>
+          <a:lstStyle/>
+          <a:p>
+            <a:pPr algn="l"/>
+            <a:r>
+              <a:rPr sz="2200" b="1" i="0">
+                <a:solidFill>
+                  <a:srgbClr val="0D2B4E"/>
+                </a:solidFill>
+                <a:latin typeface="Calibri"/>
+              </a:rPr>
+              <a:t>Markdown Preview Enhanced</a:t>
+            </a:r>
+          </a:p>
+        </p:txBody>
+      </p:sp>
+      <p:sp>
+        <p:nvSpPr>
+          <p:cNvPr id="14" name="TextBox 13"/>
+          <p:cNvSpPr txBox="1"/>
+          <p:nvPr/>
+        </p:nvSpPr>
+        <p:spPr>
+          <a:xfrm>
+            <a:off x="868680" y="4544568"/>
+            <a:ext cx="7315200" cy="411480"/>
+          </a:xfrm>
+          <a:prstGeom prst="rect">
+            <a:avLst/>
+          </a:prstGeom>
+          <a:noFill/>
+        </p:spPr>
+        <p:txBody>
+          <a:bodyPr wrap="square">
+            <a:spAutoFit/>
+          </a:bodyPr>
+          <a:lstStyle/>
+          <a:p>
+            <a:pPr algn="l"/>
+            <a:r>
+              <a:rPr sz="1700" b="0" i="0">
+                <a:solidFill>
+                  <a:srgbClr val="6B7280"/>
+                </a:solidFill>
+                <a:latin typeface="Calibri"/>
+              </a:rPr>
+              <a:t>auto-opens .md files in a clean readable preview instead of raw text</a:t>
+            </a:r>
+          </a:p>
+        </p:txBody>
+      </p:sp>
+      <p:sp>
+        <p:nvSpPr>
+          <p:cNvPr id="15" name="TextBox 14"/>
+          <p:cNvSpPr txBox="1"/>
+          <p:nvPr/>
+        </p:nvSpPr>
+        <p:spPr>
+          <a:xfrm>
+            <a:off x="548640" y="5166360"/>
+            <a:ext cx="11064240" cy="548640"/>
+          </a:xfrm>
+          <a:prstGeom prst="rect">
+            <a:avLst/>
+          </a:prstGeom>
+          <a:noFill/>
+        </p:spPr>
+        <p:txBody>
+          <a:bodyPr wrap="square">
+            <a:spAutoFit/>
+          </a:bodyPr>
+          <a:lstStyle/>
+          <a:p>
             <a:pPr>
               <a:spcBef>
-                <a:spcPts val="1600"/>
+                <a:spcPts val="1400"/>
               </a:spcBef>
             </a:pPr>
             <a:r>
-              <a:rPr sz="1900" b="0" i="1">
+              <a:rPr sz="1700" b="0" i="0">
                 <a:solidFill>
                   <a:srgbClr val="6B7280"/>
                 </a:solidFill>
                 <a:latin typeface="Calibri"/>
               </a:rPr>
-              <a:t>Once both are installed, you will see the Claude Code icon appear in your VS Code sidebar.</a:t>
+              <a:t>Once installed, right-click any .md file and select  "Open Preview"  -- or press  Ctrl + Shift + V  (Cmd + Shift + V on Mac)  to toggle preview at any time.</a:t>
             </a:r>
           </a:p>
         </p:txBody>
